--- a/lectures/Lecture 3.1 - REST APIs and HTTP.pptx
+++ b/lectures/Lecture 3.1 - REST APIs and HTTP.pptx
@@ -1954,7 +1954,7 @@
             </a:pPr>
             <a:r>
               <a:rPr lang="en-US"/>
-              <a:t>Every constraint should be paired with the pain from Section 2 that it prevents. Uniform interface kills verb proliferation. Statelessness kills hidden-state coupling. Client-server lets frontend and backend teams actually work in parallel.</a:t>
+              <a:t>Every constraint should get paired with the pain from Section 2 that it prevents - the uniform interface is what kills verb proliferation, statelessness is what kills the hidden-state coupling, and client-server is what lets a frontend team and a backend team actually work at the same time without stepping on each other.</a:t>
             </a:r>
             <a:endParaRPr/>
           </a:p>
@@ -2112,7 +2112,7 @@
             </a:pPr>
             <a:r>
               <a:rPr lang="en-US"/>
-              <a:t>Every constraint should be paired with the pain from Section 2 that it prevents. Uniform interface kills verb proliferation. Statelessness kills hidden-state coupling. Client-server lets frontend and backend teams actually work in parallel.</a:t>
+              <a:t>Every constraint should get paired with the pain from Section 2 that it prevents - the uniform interface is what kills verb proliferation, statelessness is what kills the hidden-state coupling, and client-server is what lets a frontend team and a backend team actually work at the same time without stepping on each other.</a:t>
             </a:r>
             <a:endParaRPr/>
           </a:p>
@@ -2270,7 +2270,7 @@
             </a:pPr>
             <a:r>
               <a:rPr lang="en-US"/>
-              <a:t>Every constraint should be paired with the pain from Section 2 that it prevents. Uniform interface kills verb proliferation. Statelessness kills hidden-state coupling. Client-server lets frontend and backend teams actually work in parallel.</a:t>
+              <a:t>Every constraint should get paired with the pain from Section 2 that it prevents - the uniform interface is what kills verb proliferation, statelessness is what kills the hidden-state coupling, and client-server is what lets a frontend team and a backend team actually work at the same time without stepping on each other.</a:t>
             </a:r>
             <a:endParaRPr/>
           </a:p>
@@ -2428,7 +2428,7 @@
             </a:pPr>
             <a:r>
               <a:rPr lang="en-US"/>
-              <a:t>Every scalable web service on earth runs on this trick.</a:t>
+              <a:t>Basically every scalable web service running today leans on this.</a:t>
             </a:r>
             <a:endParaRPr/>
           </a:p>
@@ -2598,7 +2598,7 @@
             </a:pPr>
             <a:r>
               <a:rPr lang="en-US"/>
-              <a:t>Frame REST as the answer to a design problem, not a reference manual.</a:t>
+              <a:t>Frame REST as an answer to a design problem. Nobody needs the reference-manual version of this.</a:t>
             </a:r>
             <a:endParaRPr/>
           </a:p>
@@ -2914,7 +2914,7 @@
             </a:pPr>
             <a:r>
               <a:rPr lang="en-US"/>
-              <a:t>This is the uniform interface constraint made concrete. The URL is for naming. The HTTP method carries the action. Connect to the student's instincts from the discussion.</a:t>
+              <a:t>This is the uniform interface constraint made concrete, with the URL doing the naming and the HTTP method carrying the action. Tie it back to whatever they came up with in the discussion.</a:t>
             </a:r>
             <a:endParaRPr/>
           </a:p>
@@ -3072,7 +3072,7 @@
             </a:pPr>
             <a:r>
               <a:rPr lang="en-US"/>
-              <a:t>This is the uniform interface constraint made concrete. The URL is for naming. The HTTP method carries the action. Connect to the student's instincts from the discussion.</a:t>
+              <a:t>This is the uniform interface constraint made concrete, with the URL doing the naming and the HTTP method carrying the action. Tie it back to whatever they came up with in the discussion.</a:t>
             </a:r>
             <a:endParaRPr/>
           </a:p>
@@ -3546,7 +3546,7 @@
             </a:pPr>
             <a:r>
               <a:rPr lang="en-US"/>
-              <a:t>This is the table that makes REST click. Every entry is URL + method = one clear meaning. No one invented new verbs. Nothing is ambiguous. Walk through a few and ask the class what each does.</a:t>
+              <a:t>This is the table that makes REST click for people. Every entry is a URL plus a method adding up to exactly one meaning, nobody had to invent a new verb, and there's nothing ambiguous anywhere in it. Walk a few and ask the class what each one does.</a:t>
             </a:r>
             <a:endParaRPr/>
           </a:p>
@@ -3704,7 +3704,7 @@
             </a:pPr>
             <a:r>
               <a:rPr lang="en-US"/>
-              <a:t>Status codes are another uniform-interface win. Every REST API on earth uses this same numbering. Clients don't have to parse error messages: they can branch on the code.</a:t>
+              <a:t>Status codes are another uniform-interface win, and everybody uses the same numbering, which means a client never has to parse an error message to find out what happened - it just branches on the code.</a:t>
             </a:r>
             <a:endParaRPr/>
           </a:p>
@@ -4178,7 +4178,7 @@
             </a:pPr>
             <a:r>
               <a:rPr lang="en-US"/>
-              <a:t>Now zoom all the way in. Show a raw HTTP exchange. The point is to demystify: nothing here is magic, it is all plain text.</a:t>
+              <a:t>Now zoom all the way in and show them a raw exchange. It's all plain text, and seeing that once does more than any amount of me saying so.</a:t>
             </a:r>
             <a:endParaRPr/>
           </a:p>
@@ -4494,7 +4494,7 @@
             </a:pPr>
             <a:r>
               <a:rPr lang="en-US"/>
-              <a:t>This is what goes across the TCP connection. Literally these bytes. Request line, then headers, then a blank line, then the body. That's the whole protocol. Walk through each line.</a:t>
+              <a:t>This is what actually goes across the TCP connection, literally these bytes - request line, then headers, then a blank line, then the body, and that's the entire protocol. Walk each line.</a:t>
             </a:r>
             <a:endParaRPr/>
           </a:p>
@@ -5284,7 +5284,7 @@
             </a:pPr>
             <a:r>
               <a:rPr lang="en-US"/>
-              <a:t>Key teaching moment on idempotence: the client could send this twice (say, because their network dropped and they retried) and the server's state ends up the same either way. That is the entire point of the idempotence property.</a:t>
+              <a:t>Good moment for idempotence: the client could send this exact thing twice, say their network dropped and the phone retried on its own, and the server ends up in the same state either way...which is the whole reason anybody cares about the property.</a:t>
             </a:r>
             <a:endParaRPr/>
           </a:p>
@@ -6244,7 +6244,7 @@
             </a:pPr>
             <a:r>
               <a:rPr lang="en-US"/>
-              <a:t>The list is deliberately long. The point is that this is a LOT of manual work for one endpoint.</a:t>
+              <a:t>The list is deliberately long, because it really is a LOT of manual work for one endpoint.</a:t>
             </a:r>
             <a:endParaRPr/>
           </a:p>
@@ -6272,7 +6272,7 @@
             </a:pPr>
             <a:r>
               <a:rPr lang="en-US"/>
-              <a:t>That's the minimum. Per request. Before thinking about errors.</a:t>
+              <a:t>That's the minimum, per request, before you've thought about errors at all.</a:t>
             </a:r>
             <a:endParaRPr/>
           </a:p>
@@ -6442,7 +6442,7 @@
             </a:pPr>
             <a:r>
               <a:rPr lang="en-US"/>
-              <a:t>Walk through this live. Every line is doing something a framework would do for you. No routing (just an if), no body parsing, no JSON, no error handling, no concurrency (one request at a time), no graceful shutdown. And this is just the 'hello world' of web servers.</a:t>
+              <a:t>Walk this one live. Every line is doing something a framework would otherwise do for you - no routing beyond an if, no body parsing, no JSON, no error handling, no concurrency at all since it takes one request at a time, and no graceful shutdown. And this is the 'hello world' of web servers.</a:t>
             </a:r>
             <a:endParaRPr/>
           </a:p>
@@ -6628,7 +6628,7 @@
             </a:pPr>
             <a:r>
               <a:rPr lang="en-US"/>
-              <a:t>Transition slide. We've seen the misery. We're about to see the way out. Tee up the type hints pivot without actually introducing FastAPI yet.</a:t>
+              <a:t>Transition slide - they've felt the misery now, so tee up the type hints pivot without actually introducing FastAPI yet.</a:t>
             </a:r>
             <a:endParaRPr/>
           </a:p>

--- a/lectures/Lecture 3.1 - REST APIs and HTTP.pptx
+++ b/lectures/Lecture 3.1 - REST APIs and HTTP.pptx
@@ -1003,20 +1003,9 @@
           </a:bodyPr>
           <a:lstStyle/>
           <a:p>
-            <a:pPr marL="0" lvl="0" indent="0" algn="l" rtl="0">
-              <a:spcBef>
-                <a:spcPts val="0"/>
-              </a:spcBef>
-              <a:spcAft>
-                <a:spcPts val="0"/>
-              </a:spcAft>
-              <a:buNone/>
-            </a:pPr>
-            <a:r>
-              <a:rPr lang="en-US"/>
-              <a:t>These three pains are the motivation for everything in Section 4.</a:t>
-            </a:r>
-            <a:endParaRPr/>
+            <a:r>
+              <a:t>Each pain maps to a constraint on slide 15.</a:t>
+            </a:r>
           </a:p>
         </p:txBody>
       </p:sp>
@@ -1161,20 +1150,9 @@
           </a:bodyPr>
           <a:lstStyle/>
           <a:p>
-            <a:pPr marL="0" lvl="0" indent="0" algn="l" rtl="0">
-              <a:spcBef>
-                <a:spcPts val="0"/>
-              </a:spcBef>
-              <a:spcAft>
-                <a:spcPts val="0"/>
-              </a:spcAft>
-              <a:buNone/>
-            </a:pPr>
-            <a:r>
-              <a:rPr lang="en-US"/>
-              <a:t>These three pains are the motivation for everything in Section 4.</a:t>
-            </a:r>
-            <a:endParaRPr/>
+            <a:r>
+              <a:t>Each pain maps to a constraint on slide 15.</a:t>
+            </a:r>
           </a:p>
         </p:txBody>
       </p:sp>
@@ -1319,20 +1297,9 @@
           </a:bodyPr>
           <a:lstStyle/>
           <a:p>
-            <a:pPr marL="0" lvl="0" indent="0" algn="l" rtl="0">
-              <a:spcBef>
-                <a:spcPts val="0"/>
-              </a:spcBef>
-              <a:spcAft>
-                <a:spcPts val="0"/>
-              </a:spcAft>
-              <a:buNone/>
-            </a:pPr>
-            <a:r>
-              <a:rPr lang="en-US"/>
-              <a:t>These three pains are the motivation for everything in Section 4.</a:t>
-            </a:r>
-            <a:endParaRPr/>
+            <a:r>
+              <a:t>Each pain maps to a constraint on slide 15.</a:t>
+            </a:r>
           </a:p>
         </p:txBody>
       </p:sp>
@@ -1477,20 +1444,9 @@
           </a:bodyPr>
           <a:lstStyle/>
           <a:p>
-            <a:pPr marL="0" lvl="0" indent="0" algn="l" rtl="0">
-              <a:spcBef>
-                <a:spcPts val="0"/>
-              </a:spcBef>
-              <a:spcAft>
-                <a:spcPts val="0"/>
-              </a:spcAft>
-              <a:buNone/>
-            </a:pPr>
-            <a:r>
-              <a:rPr lang="en-US"/>
-              <a:t>Fish for: (a) NAMING - did they land on something like /messages or     /channels/general/messages? This is the URL-as-resource intuition. (b) VERBS - did they distinguish 'read' from 'write' from 'delete'     somehow? This is the HTTP method intuition. (c) STATE - did anyone ask 'how does the server know who I am?'     Good! That's the stateless/auth question. The goal is for Section 4 to feel like validation of what they already said, not a lecture from the mountaintop.</a:t>
-            </a:r>
-            <a:endParaRPr/>
+            <a:r>
+              <a:t>Listen for: /messages-style names, read/write/delete split, 'how does the server know me?'</a:t>
+            </a:r>
           </a:p>
         </p:txBody>
       </p:sp>
@@ -1943,20 +1899,9 @@
           </a:bodyPr>
           <a:lstStyle/>
           <a:p>
-            <a:pPr marL="0" lvl="0" indent="0" algn="l" rtl="0">
-              <a:spcBef>
-                <a:spcPts val="0"/>
-              </a:spcBef>
-              <a:spcAft>
-                <a:spcPts val="0"/>
-              </a:spcAft>
-              <a:buNone/>
-            </a:pPr>
-            <a:r>
-              <a:rPr lang="en-US"/>
-              <a:t>Every constraint should get paired with the pain from Section 2 that it prevents - the uniform interface is what kills verb proliferation, statelessness is what kills the hidden-state coupling, and client-server is what lets a frontend team and a backend team actually work at the same time without stepping on each other.</a:t>
-            </a:r>
-            <a:endParaRPr/>
+            <a:r>
+              <a:t>Pair each with its RPC pain: uniform interface vs verbs, stateless vs hidden state.</a:t>
+            </a:r>
           </a:p>
         </p:txBody>
       </p:sp>
@@ -2101,20 +2046,9 @@
           </a:bodyPr>
           <a:lstStyle/>
           <a:p>
-            <a:pPr marL="0" lvl="0" indent="0" algn="l" rtl="0">
-              <a:spcBef>
-                <a:spcPts val="0"/>
-              </a:spcBef>
-              <a:spcAft>
-                <a:spcPts val="0"/>
-              </a:spcAft>
-              <a:buNone/>
-            </a:pPr>
-            <a:r>
-              <a:rPr lang="en-US"/>
-              <a:t>Every constraint should get paired with the pain from Section 2 that it prevents - the uniform interface is what kills verb proliferation, statelessness is what kills the hidden-state coupling, and client-server is what lets a frontend team and a backend team actually work at the same time without stepping on each other.</a:t>
-            </a:r>
-            <a:endParaRPr/>
+            <a:r>
+              <a:t>Pair each with its RPC pain: uniform interface vs verbs, stateless vs hidden state.</a:t>
+            </a:r>
           </a:p>
         </p:txBody>
       </p:sp>
@@ -2259,20 +2193,9 @@
           </a:bodyPr>
           <a:lstStyle/>
           <a:p>
-            <a:pPr marL="0" lvl="0" indent="0" algn="l" rtl="0">
-              <a:spcBef>
-                <a:spcPts val="0"/>
-              </a:spcBef>
-              <a:spcAft>
-                <a:spcPts val="0"/>
-              </a:spcAft>
-              <a:buNone/>
-            </a:pPr>
-            <a:r>
-              <a:rPr lang="en-US"/>
-              <a:t>Every constraint should get paired with the pain from Section 2 that it prevents - the uniform interface is what kills verb proliferation, statelessness is what kills the hidden-state coupling, and client-server is what lets a frontend team and a backend team actually work at the same time without stepping on each other.</a:t>
-            </a:r>
-            <a:endParaRPr/>
+            <a:r>
+              <a:t>Pair each with its RPC pain: uniform interface vs verbs, stateless vs hidden state.</a:t>
+            </a:r>
           </a:p>
         </p:txBody>
       </p:sp>
@@ -2416,34 +2339,7 @@
             <a:noAutofit/>
           </a:bodyPr>
           <a:lstStyle/>
-          <a:p>
-            <a:pPr marL="0" lvl="0" indent="0" algn="l" rtl="0">
-              <a:spcBef>
-                <a:spcPts val="0"/>
-              </a:spcBef>
-              <a:spcAft>
-                <a:spcPts val="0"/>
-              </a:spcAft>
-              <a:buNone/>
-            </a:pPr>
-            <a:r>
-              <a:rPr lang="en-US"/>
-              <a:t>Basically every scalable web service running today leans on this.</a:t>
-            </a:r>
-            <a:endParaRPr/>
-          </a:p>
-          <a:p>
-            <a:pPr marL="0" lvl="0" indent="0" algn="l" rtl="0">
-              <a:spcBef>
-                <a:spcPts val="0"/>
-              </a:spcBef>
-              <a:spcAft>
-                <a:spcPts val="0"/>
-              </a:spcAft>
-              <a:buNone/>
-            </a:pPr>
-            <a:endParaRPr/>
-          </a:p>
+          <a:p/>
         </p:txBody>
       </p:sp>
       <p:sp>
@@ -2586,22 +2482,7 @@
             <a:noAutofit/>
           </a:bodyPr>
           <a:lstStyle/>
-          <a:p>
-            <a:pPr marL="0" lvl="0" indent="0" algn="l" rtl="0">
-              <a:spcBef>
-                <a:spcPts val="0"/>
-              </a:spcBef>
-              <a:spcAft>
-                <a:spcPts val="0"/>
-              </a:spcAft>
-              <a:buNone/>
-            </a:pPr>
-            <a:r>
-              <a:rPr lang="en-US"/>
-              <a:t>Frame REST as an answer to a design problem. Nobody needs the reference-manual version of this.</a:t>
-            </a:r>
-            <a:endParaRPr/>
-          </a:p>
+          <a:p/>
         </p:txBody>
       </p:sp>
       <p:sp>
@@ -2744,22 +2625,7 @@
             <a:noAutofit/>
           </a:bodyPr>
           <a:lstStyle/>
-          <a:p>
-            <a:pPr marL="0" lvl="0" indent="0" algn="l" rtl="0">
-              <a:spcBef>
-                <a:spcPts val="0"/>
-              </a:spcBef>
-              <a:spcAft>
-                <a:spcPts val="0"/>
-              </a:spcAft>
-              <a:buNone/>
-            </a:pPr>
-            <a:r>
-              <a:rPr lang="en-US"/>
-              <a:t>Now the mechanics. Connect each piece back to a constraint.</a:t>
-            </a:r>
-            <a:endParaRPr/>
-          </a:p>
+          <a:p/>
         </p:txBody>
       </p:sp>
       <p:sp>
@@ -2903,20 +2769,9 @@
           </a:bodyPr>
           <a:lstStyle/>
           <a:p>
-            <a:pPr marL="0" lvl="0" indent="0" algn="l" rtl="0">
-              <a:spcBef>
-                <a:spcPts val="0"/>
-              </a:spcBef>
-              <a:spcAft>
-                <a:spcPts val="0"/>
-              </a:spcAft>
-              <a:buNone/>
-            </a:pPr>
-            <a:r>
-              <a:rPr lang="en-US"/>
-              <a:t>This is the uniform interface constraint made concrete, with the URL doing the naming and the HTTP method carrying the action. Tie it back to whatever they came up with in the discussion.</a:t>
-            </a:r>
-            <a:endParaRPr/>
+            <a:r>
+              <a:t>Compare to their discussion answers from slide 12.</a:t>
+            </a:r>
           </a:p>
         </p:txBody>
       </p:sp>
@@ -3061,20 +2916,9 @@
           </a:bodyPr>
           <a:lstStyle/>
           <a:p>
-            <a:pPr marL="0" lvl="0" indent="0" algn="l" rtl="0">
-              <a:spcBef>
-                <a:spcPts val="0"/>
-              </a:spcBef>
-              <a:spcAft>
-                <a:spcPts val="0"/>
-              </a:spcAft>
-              <a:buNone/>
-            </a:pPr>
-            <a:r>
-              <a:rPr lang="en-US"/>
-              <a:t>This is the uniform interface constraint made concrete, with the URL doing the naming and the HTTP method carrying the action. Tie it back to whatever they came up with in the discussion.</a:t>
-            </a:r>
-            <a:endParaRPr/>
+            <a:r>
+              <a:t>Compare to their discussion answers from slide 12.</a:t>
+            </a:r>
           </a:p>
         </p:txBody>
       </p:sp>
@@ -3219,20 +3063,9 @@
           </a:bodyPr>
           <a:lstStyle/>
           <a:p>
-            <a:pPr marL="0" lvl="0" indent="0" algn="l" rtl="0">
-              <a:spcBef>
-                <a:spcPts val="0"/>
-              </a:spcBef>
-              <a:spcAft>
-                <a:spcPts val="0"/>
-              </a:spcAft>
-              <a:buNone/>
-            </a:pPr>
-            <a:r>
-              <a:rPr lang="en-US"/>
-              <a:t>Idempotence sounds abstract until you tie it to network unreliability. The moment a student's phone drops signal mid-request, they care a lot about whether retrying is safe.</a:t>
-            </a:r>
-            <a:endParaRPr/>
+            <a:r>
+              <a:t>Tie idempotence to a phone dropping signal mid-request: is retry safe?</a:t>
+            </a:r>
           </a:p>
         </p:txBody>
       </p:sp>
@@ -3377,20 +3210,9 @@
           </a:bodyPr>
           <a:lstStyle/>
           <a:p>
-            <a:pPr marL="0" lvl="0" indent="0" algn="l" rtl="0">
-              <a:spcBef>
-                <a:spcPts val="0"/>
-              </a:spcBef>
-              <a:spcAft>
-                <a:spcPts val="0"/>
-              </a:spcAft>
-              <a:buNone/>
-            </a:pPr>
-            <a:r>
-              <a:rPr lang="en-US"/>
-              <a:t>Idempotence sounds abstract until you tie it to network unreliability. The moment a student's phone drops signal mid-request, they care a lot about whether retrying is safe.</a:t>
-            </a:r>
-            <a:endParaRPr/>
+            <a:r>
+              <a:t>Tie idempotence to a phone dropping signal mid-request: is retry safe?</a:t>
+            </a:r>
           </a:p>
         </p:txBody>
       </p:sp>
@@ -3535,20 +3357,9 @@
           </a:bodyPr>
           <a:lstStyle/>
           <a:p>
-            <a:pPr marL="0" lvl="0" indent="0" algn="l" rtl="0">
-              <a:spcBef>
-                <a:spcPts val="0"/>
-              </a:spcBef>
-              <a:spcAft>
-                <a:spcPts val="0"/>
-              </a:spcAft>
-              <a:buNone/>
-            </a:pPr>
-            <a:r>
-              <a:rPr lang="en-US"/>
-              <a:t>This is the table that makes REST click for people. Every entry is a URL plus a method adding up to exactly one meaning, nobody had to invent a new verb, and there's nothing ambiguous anywhere in it. Walk a few and ask the class what each one does.</a:t>
-            </a:r>
-            <a:endParaRPr/>
+            <a:r>
+              <a:t>Walk a few rows; ask class what each does.</a:t>
+            </a:r>
           </a:p>
         </p:txBody>
       </p:sp>
@@ -3693,20 +3504,9 @@
           </a:bodyPr>
           <a:lstStyle/>
           <a:p>
-            <a:pPr marL="0" lvl="0" indent="0" algn="l" rtl="0">
-              <a:spcBef>
-                <a:spcPts val="0"/>
-              </a:spcBef>
-              <a:spcAft>
-                <a:spcPts val="0"/>
-              </a:spcAft>
-              <a:buNone/>
-            </a:pPr>
-            <a:r>
-              <a:rPr lang="en-US"/>
-              <a:t>Status codes are another uniform-interface win, and everybody uses the same numbering, which means a client never has to parse an error message to find out what happened - it just branches on the code.</a:t>
-            </a:r>
-            <a:endParaRPr/>
+            <a:r>
+              <a:t>Client branches on the code, never parses the error message.</a:t>
+            </a:r>
           </a:p>
         </p:txBody>
       </p:sp>
@@ -3851,20 +3651,9 @@
           </a:bodyPr>
           <a:lstStyle/>
           <a:p>
-            <a:pPr marL="0" lvl="0" indent="0" algn="l" rtl="0">
-              <a:spcBef>
-                <a:spcPts val="0"/>
-              </a:spcBef>
-              <a:spcAft>
-                <a:spcPts val="0"/>
-              </a:spcAft>
-              <a:buNone/>
-            </a:pPr>
-            <a:r>
-              <a:rPr lang="en-US"/>
-              <a:t>Keep headers brief. Students mostly need to recognize Content-Type and Authorization for now. The rest is 'you'll see these in the wild; don't be scared of them.'</a:t>
-            </a:r>
-            <a:endParaRPr/>
+            <a:r>
+              <a:t>Only Content-Type and Authorization matter now; the rest is recognition.</a:t>
+            </a:r>
           </a:p>
         </p:txBody>
       </p:sp>
@@ -4009,20 +3798,9 @@
           </a:bodyPr>
           <a:lstStyle/>
           <a:p>
-            <a:pPr marL="0" lvl="0" indent="0" algn="l" rtl="0">
-              <a:spcBef>
-                <a:spcPts val="0"/>
-              </a:spcBef>
-              <a:spcAft>
-                <a:spcPts val="0"/>
-              </a:spcAft>
-              <a:buNone/>
-            </a:pPr>
-            <a:r>
-              <a:rPr lang="en-US"/>
-              <a:t>Students already met JSON in 2.1. This slide is a reminder, not a new introduction. Main point: JSON is the default wire format, and that choice is boring enough that you stop thinking about it.</a:t>
-            </a:r>
-            <a:endParaRPr/>
+            <a:r>
+              <a:t>Reminder only; JSON was in 2.1.</a:t>
+            </a:r>
           </a:p>
         </p:txBody>
       </p:sp>
@@ -4166,22 +3944,7 @@
             <a:noAutofit/>
           </a:bodyPr>
           <a:lstStyle/>
-          <a:p>
-            <a:pPr marL="0" lvl="0" indent="0" algn="l" rtl="0">
-              <a:spcBef>
-                <a:spcPts val="0"/>
-              </a:spcBef>
-              <a:spcAft>
-                <a:spcPts val="0"/>
-              </a:spcAft>
-              <a:buNone/>
-            </a:pPr>
-            <a:r>
-              <a:rPr lang="en-US"/>
-              <a:t>Now zoom all the way in and show them a raw exchange. It's all plain text, and seeing that once does more than any amount of me saying so.</a:t>
-            </a:r>
-            <a:endParaRPr/>
-          </a:p>
+          <a:p/>
         </p:txBody>
       </p:sp>
       <p:sp>
@@ -4325,20 +4088,9 @@
           </a:bodyPr>
           <a:lstStyle/>
           <a:p>
-            <a:pPr marL="0" lvl="0" indent="0" algn="l" rtl="0">
-              <a:spcBef>
-                <a:spcPts val="0"/>
-              </a:spcBef>
-              <a:spcAft>
-                <a:spcPts val="0"/>
-              </a:spcAft>
-              <a:buNone/>
-            </a:pPr>
-            <a:r>
-              <a:rPr lang="en-US"/>
-              <a:t>The whole lecture hinges on framing this as a design problem. Resist the urge to jump to 'REST is an architectural style.' Stay with the conversation metaphor.</a:t>
-            </a:r>
-            <a:endParaRPr/>
+            <a:r>
+              <a:t>Stay on the design problem; no 'architectural style' definition yet.</a:t>
+            </a:r>
           </a:p>
         </p:txBody>
       </p:sp>
@@ -4483,20 +4235,9 @@
           </a:bodyPr>
           <a:lstStyle/>
           <a:p>
-            <a:pPr marL="0" lvl="0" indent="0" algn="l" rtl="0">
-              <a:spcBef>
-                <a:spcPts val="0"/>
-              </a:spcBef>
-              <a:spcAft>
-                <a:spcPts val="0"/>
-              </a:spcAft>
-              <a:buNone/>
-            </a:pPr>
-            <a:r>
-              <a:rPr lang="en-US"/>
-              <a:t>This is what actually goes across the TCP connection, literally these bytes - request line, then headers, then a blank line, then the body, and that's the entire protocol. Walk each line.</a:t>
-            </a:r>
-            <a:endParaRPr/>
+            <a:r>
+              <a:t>Walk each line: request line, headers, blank line, body.</a:t>
+            </a:r>
           </a:p>
         </p:txBody>
       </p:sp>
@@ -4641,20 +4382,9 @@
           </a:bodyPr>
           <a:lstStyle/>
           <a:p>
-            <a:pPr marL="0" lvl="0" indent="0" algn="l" rtl="0">
-              <a:spcBef>
-                <a:spcPts val="0"/>
-              </a:spcBef>
-              <a:spcAft>
-                <a:spcPts val="0"/>
-              </a:spcAft>
-              <a:buNone/>
-            </a:pPr>
-            <a:r>
-              <a:rPr lang="en-US"/>
-              <a:t>201 because a new resource was created. The response body echoes back the canonical representation, including the server-assigned id and timestamp. This is a common REST pattern: POST returns the created resource.</a:t>
-            </a:r>
-            <a:endParaRPr/>
+            <a:r>
+              <a:t>Point out server-assigned id and timestamp; POST returns the created resource.</a:t>
+            </a:r>
           </a:p>
         </p:txBody>
       </p:sp>
@@ -4799,20 +4529,9 @@
           </a:bodyPr>
           <a:lstStyle/>
           <a:p>
-            <a:pPr marL="0" lvl="0" indent="0" algn="l" rtl="0">
-              <a:spcBef>
-                <a:spcPts val="0"/>
-              </a:spcBef>
-              <a:spcAft>
-                <a:spcPts val="0"/>
-              </a:spcAft>
-              <a:buNone/>
-            </a:pPr>
-            <a:r>
-              <a:rPr lang="en-US"/>
-              <a:t>curl is the no-nonsense command-line HTTP client. -v shows you the raw request and response with &gt; and &lt; prefixes. When you're debugging an API, this is usually the first tool you reach for. Assignment 2 will have you use it.</a:t>
-            </a:r>
-            <a:endParaRPr/>
+            <a:r>
+              <a:t>`-v`: &gt; is request, &lt; is response. Assignment 2 uses this.</a:t>
+            </a:r>
           </a:p>
         </p:txBody>
       </p:sp>
@@ -4957,20 +4676,9 @@
           </a:bodyPr>
           <a:lstStyle/>
           <a:p>
-            <a:pPr marL="0" lvl="0" indent="0" algn="l" rtl="0">
-              <a:spcBef>
-                <a:spcPts val="0"/>
-              </a:spcBef>
-              <a:spcAft>
-                <a:spcPts val="0"/>
-              </a:spcAft>
-              <a:buNone/>
-            </a:pPr>
-            <a:r>
-              <a:rPr lang="en-US"/>
-              <a:t>curl is the no-nonsense command-line HTTP client. -v shows you the raw request and response with &gt; and &lt; prefixes. When you're debugging an API, this is usually the first tool you reach for. Assignment 2 will have you use it.</a:t>
-            </a:r>
-            <a:endParaRPr/>
+            <a:r>
+              <a:t>`-v`: &gt; is request, &lt; is response. Assignment 2 uses this.</a:t>
+            </a:r>
           </a:p>
         </p:txBody>
       </p:sp>
@@ -5115,20 +4823,9 @@
           </a:bodyPr>
           <a:lstStyle/>
           <a:p>
-            <a:pPr marL="0" lvl="0" indent="0" algn="l" rtl="0">
-              <a:spcBef>
-                <a:spcPts val="0"/>
-              </a:spcBef>
-              <a:spcAft>
-                <a:spcPts val="0"/>
-              </a:spcAft>
-              <a:buNone/>
-            </a:pPr>
-            <a:r>
-              <a:rPr lang="en-US"/>
-              <a:t>Give the class 2 minutes. This is a reading comprehension exercise: can they parse a raw HTTP request and say what it means? If they can do this, they understand REST at the level they need for assignment 2.</a:t>
-            </a:r>
-            <a:endParaRPr/>
+            <a:r>
+              <a:t>2 min.</a:t>
+            </a:r>
           </a:p>
         </p:txBody>
       </p:sp>
@@ -5273,20 +4970,9 @@
           </a:bodyPr>
           <a:lstStyle/>
           <a:p>
-            <a:pPr marL="0" lvl="0" indent="0" algn="l" rtl="0">
-              <a:spcBef>
-                <a:spcPts val="0"/>
-              </a:spcBef>
-              <a:spcAft>
-                <a:spcPts val="0"/>
-              </a:spcAft>
-              <a:buNone/>
-            </a:pPr>
-            <a:r>
-              <a:rPr lang="en-US"/>
-              <a:t>Good moment for idempotence: the client could send this exact thing twice, say their network dropped and the phone retried on its own, and the server ends up in the same state either way...which is the whole reason anybody cares about the property.</a:t>
-            </a:r>
-            <a:endParaRPr/>
+            <a:r>
+              <a:t>Example: phone drops signal and auto-retries; server state identical either way.</a:t>
+            </a:r>
           </a:p>
         </p:txBody>
       </p:sp>
@@ -5430,22 +5116,7 @@
             <a:noAutofit/>
           </a:bodyPr>
           <a:lstStyle/>
-          <a:p>
-            <a:pPr marL="0" lvl="0" indent="0" algn="l" rtl="0">
-              <a:spcBef>
-                <a:spcPts val="0"/>
-              </a:spcBef>
-              <a:spcAft>
-                <a:spcPts val="0"/>
-              </a:spcAft>
-              <a:buNone/>
-            </a:pPr>
-            <a:r>
-              <a:rPr lang="en-US"/>
-              <a:t>Forward reference to 3.2 so students know where this is going, and a concrete pointer to the assignment so the lecture content feels connected to work they'll actually do.</a:t>
-            </a:r>
-            <a:endParaRPr/>
-          </a:p>
+          <a:p/>
         </p:txBody>
       </p:sp>
       <p:sp>
@@ -5588,22 +5259,7 @@
             <a:noAutofit/>
           </a:bodyPr>
           <a:lstStyle/>
-          <a:p>
-            <a:pPr marL="0" lvl="0" indent="0" algn="l" rtl="0">
-              <a:spcBef>
-                <a:spcPts val="0"/>
-              </a:spcBef>
-              <a:spcAft>
-                <a:spcPts val="0"/>
-              </a:spcAft>
-              <a:buNone/>
-            </a:pPr>
-            <a:r>
-              <a:rPr lang="en-US"/>
-              <a:t>Forward reference to 3.2 so students know where this is going, and a concrete pointer to the assignment so the lecture content feels connected to work they'll actually do.</a:t>
-            </a:r>
-            <a:endParaRPr/>
-          </a:p>
+          <a:p/>
         </p:txBody>
       </p:sp>
       <p:sp>
@@ -5747,20 +5403,9 @@
           </a:bodyPr>
           <a:lstStyle/>
           <a:p>
-            <a:pPr marL="0" lvl="0" indent="0" algn="l" rtl="0">
-              <a:spcBef>
-                <a:spcPts val="0"/>
-              </a:spcBef>
-              <a:spcAft>
-                <a:spcPts val="0"/>
-              </a:spcAft>
-              <a:buNone/>
-            </a:pPr>
-            <a:r>
-              <a:rPr lang="en-US"/>
-              <a:t>Short section. The goal is for students to feel the misery of writing a handler by hand, then want the framework. Don't dwell - one ugly code slide is enough.</a:t>
-            </a:r>
-            <a:endParaRPr/>
+            <a:r>
+              <a:t>Short section; don't dwell on the socket code.</a:t>
+            </a:r>
           </a:p>
         </p:txBody>
       </p:sp>
@@ -5905,20 +5550,9 @@
           </a:bodyPr>
           <a:lstStyle/>
           <a:p>
-            <a:pPr marL="0" lvl="0" indent="0" algn="l" rtl="0">
-              <a:spcBef>
-                <a:spcPts val="0"/>
-              </a:spcBef>
-              <a:spcAft>
-                <a:spcPts val="0"/>
-              </a:spcAft>
-              <a:buNone/>
-            </a:pPr>
-            <a:r>
-              <a:rPr lang="en-US"/>
-              <a:t>Deliberate callback to 3.1 so students have the wire-level content fresh in mind. We are going to build up to a framework by showing what's hiding behind it.</a:t>
-            </a:r>
-            <a:endParaRPr/>
+            <a:r>
+              <a:t>Same request as slide 29.</a:t>
+            </a:r>
           </a:p>
         </p:txBody>
       </p:sp>
@@ -6063,32 +5697,9 @@
           </a:bodyPr>
           <a:lstStyle/>
           <a:p>
-            <a:pPr marL="0" lvl="0" indent="0" algn="l" rtl="0">
-              <a:spcBef>
-                <a:spcPts val="0"/>
-              </a:spcBef>
-              <a:spcAft>
-                <a:spcPts val="0"/>
-              </a:spcAft>
-              <a:buNone/>
-            </a:pPr>
-            <a:r>
-              <a:rPr lang="en-US"/>
-              <a:t>The whole lecture hinges on framing this as a design problem. Resist the urge to jump to 'REST is an architectural style.' Stay with the conversation metaphor. Today: how people learned to design that conversation well.</a:t>
-            </a:r>
-            <a:endParaRPr/>
-          </a:p>
-          <a:p>
-            <a:pPr marL="0" lvl="0" indent="0" algn="l" rtl="0">
-              <a:spcBef>
-                <a:spcPts val="0"/>
-              </a:spcBef>
-              <a:spcAft>
-                <a:spcPts val="0"/>
-              </a:spcAft>
-              <a:buNone/>
-            </a:pPr>
-            <a:endParaRPr/>
+            <a:r>
+              <a:t>Stay on the design problem; no 'architectural style' definition yet.</a:t>
+            </a:r>
           </a:p>
         </p:txBody>
       </p:sp>
@@ -6233,60 +5844,9 @@
           </a:bodyPr>
           <a:lstStyle/>
           <a:p>
-            <a:pPr marL="0" lvl="0" indent="0" algn="l" rtl="0">
-              <a:spcBef>
-                <a:spcPts val="0"/>
-              </a:spcBef>
-              <a:spcAft>
-                <a:spcPts val="0"/>
-              </a:spcAft>
-              <a:buNone/>
-            </a:pPr>
-            <a:r>
-              <a:rPr lang="en-US"/>
-              <a:t>The list is deliberately long, because it really is a LOT of manual work for one endpoint.</a:t>
-            </a:r>
-            <a:endParaRPr/>
-          </a:p>
-          <a:p>
-            <a:pPr marL="0" lvl="0" indent="0" algn="l" rtl="0">
-              <a:spcBef>
-                <a:spcPts val="0"/>
-              </a:spcBef>
-              <a:spcAft>
-                <a:spcPts val="0"/>
-              </a:spcAft>
-              <a:buNone/>
-            </a:pPr>
-            <a:endParaRPr/>
-          </a:p>
-          <a:p>
-            <a:pPr marL="0" lvl="0" indent="0" algn="l" rtl="0">
-              <a:spcBef>
-                <a:spcPts val="0"/>
-              </a:spcBef>
-              <a:spcAft>
-                <a:spcPts val="0"/>
-              </a:spcAft>
-              <a:buNone/>
-            </a:pPr>
-            <a:r>
-              <a:rPr lang="en-US"/>
-              <a:t>That's the minimum, per request, before you've thought about errors at all.</a:t>
-            </a:r>
-            <a:endParaRPr/>
-          </a:p>
-          <a:p>
-            <a:pPr marL="0" lvl="0" indent="0" algn="l" rtl="0">
-              <a:spcBef>
-                <a:spcPts val="0"/>
-              </a:spcBef>
-              <a:spcAft>
-                <a:spcPts val="0"/>
-              </a:spcAft>
-              <a:buNone/>
-            </a:pPr>
-            <a:endParaRPr/>
+            <a:r>
+              <a:t>Add: that's the minimum per request, before any error handling.</a:t>
+            </a:r>
           </a:p>
         </p:txBody>
       </p:sp>
@@ -6431,48 +5991,9 @@
           </a:bodyPr>
           <a:lstStyle/>
           <a:p>
-            <a:pPr marL="0" lvl="0" indent="0" algn="l" rtl="0">
-              <a:spcBef>
-                <a:spcPts val="0"/>
-              </a:spcBef>
-              <a:spcAft>
-                <a:spcPts val="0"/>
-              </a:spcAft>
-              <a:buNone/>
-            </a:pPr>
-            <a:r>
-              <a:rPr lang="en-US"/>
-              <a:t>Walk this one live. Every line is doing something a framework would otherwise do for you - no routing beyond an if, no body parsing, no JSON, no error handling, no concurrency at all since it takes one request at a time, and no graceful shutdown. And this is the 'hello world' of web servers.</a:t>
-            </a:r>
-            <a:endParaRPr/>
-          </a:p>
-          <a:p>
-            <a:pPr marL="0" lvl="0" indent="0" algn="l" rtl="0">
-              <a:spcBef>
-                <a:spcPts val="0"/>
-              </a:spcBef>
-              <a:spcAft>
-                <a:spcPts val="0"/>
-              </a:spcAft>
-              <a:buNone/>
-            </a:pPr>
-            <a:endParaRPr/>
-          </a:p>
-          <a:p>
-            <a:pPr marL="0" lvl="0" indent="0" algn="l" rtl="0">
-              <a:spcBef>
-                <a:spcPts val="0"/>
-              </a:spcBef>
-              <a:spcAft>
-                <a:spcPts val="0"/>
-              </a:spcAft>
-              <a:buNone/>
-            </a:pPr>
-            <a:r>
-              <a:rPr lang="en-US"/>
-              <a:t>I needed help to write this one.</a:t>
-            </a:r>
-            <a:endParaRPr/>
+            <a:r>
+              <a:t>Walk live. Missing: routing, body parsing, JSON, errors, concurrency. Admit you needed help.</a:t>
+            </a:r>
           </a:p>
         </p:txBody>
       </p:sp>
@@ -6617,20 +6138,9 @@
           </a:bodyPr>
           <a:lstStyle/>
           <a:p>
-            <a:pPr marL="0" lvl="0" indent="0" algn="l" rtl="0">
-              <a:spcBef>
-                <a:spcPts val="0"/>
-              </a:spcBef>
-              <a:spcAft>
-                <a:spcPts val="0"/>
-              </a:spcAft>
-              <a:buNone/>
-            </a:pPr>
-            <a:r>
-              <a:rPr lang="en-US"/>
-              <a:t>Transition slide - they've felt the misery now, so tee up the type hints pivot without actually introducing FastAPI yet.</a:t>
-            </a:r>
-            <a:endParaRPr/>
+            <a:r>
+              <a:t>Don't introduce FastAPI yet; type hints come next.</a:t>
+            </a:r>
           </a:p>
         </p:txBody>
       </p:sp>
@@ -6775,36 +6285,9 @@
           </a:bodyPr>
           <a:lstStyle/>
           <a:p>
-            <a:pPr marL="0" lvl="0" indent="0" algn="l" rtl="0">
-              <a:spcBef>
-                <a:spcPts val="0"/>
-              </a:spcBef>
-              <a:spcAft>
-                <a:spcPts val="0"/>
-              </a:spcAft>
-              <a:buNone/>
-            </a:pPr>
-            <a:r>
-              <a:rPr lang="en-US"/>
-              <a:t>TCP = Transfer Control Protocol</a:t>
-            </a:r>
-            <a:endParaRPr/>
-          </a:p>
-          <a:p>
-            <a:pPr marL="0" lvl="0" indent="0" algn="l" rtl="0">
-              <a:spcBef>
-                <a:spcPts val="0"/>
-              </a:spcBef>
-              <a:spcAft>
-                <a:spcPts val="0"/>
-              </a:spcAft>
-              <a:buNone/>
-            </a:pPr>
-            <a:r>
-              <a:rPr lang="en-US"/>
-              <a:t>TLS = Transport Layer Security</a:t>
-            </a:r>
-            <a:endParaRPr/>
+            <a:r>
+              <a:t>TCP = Transmission Control Protocol; TLS = Transport Layer Security.</a:t>
+            </a:r>
           </a:p>
         </p:txBody>
       </p:sp>
@@ -6949,20 +6432,9 @@
           </a:bodyPr>
           <a:lstStyle/>
           <a:p>
-            <a:pPr marL="0" lvl="0" indent="0" algn="l" rtl="0">
-              <a:spcBef>
-                <a:spcPts val="0"/>
-              </a:spcBef>
-              <a:spcAft>
-                <a:spcPts val="0"/>
-              </a:spcAft>
-              <a:buNone/>
-            </a:pPr>
-            <a:r>
-              <a:rPr lang="en-US"/>
-              <a:t>Stateless in the sense that each exchange is self-contained. We'll come back to why that matters.</a:t>
-            </a:r>
-            <a:endParaRPr/>
+            <a:r>
+              <a:t>Say 'stateless' here: each exchange self-contained. Returns on slide 18.</a:t>
+            </a:r>
           </a:p>
         </p:txBody>
       </p:sp>
@@ -7107,20 +6579,9 @@
           </a:bodyPr>
           <a:lstStyle/>
           <a:p>
-            <a:pPr marL="0" lvl="0" indent="0" algn="l" rtl="0">
-              <a:spcBef>
-                <a:spcPts val="0"/>
-              </a:spcBef>
-              <a:spcAft>
-                <a:spcPts val="0"/>
-              </a:spcAft>
-              <a:buNone/>
-            </a:pPr>
-            <a:r>
-              <a:rPr lang="en-US"/>
-              <a:t>Short section. Name RPC, name the pains, move on. Don't dwell.</a:t>
-            </a:r>
-            <a:endParaRPr/>
+            <a:r>
+              <a:t>Name RPC, list the pains, move on.</a:t>
+            </a:r>
           </a:p>
         </p:txBody>
       </p:sp>
@@ -7265,20 +6726,9 @@
           </a:bodyPr>
           <a:lstStyle/>
           <a:p>
-            <a:pPr marL="0" lvl="0" indent="0" algn="l" rtl="0">
-              <a:spcBef>
-                <a:spcPts val="0"/>
-              </a:spcBef>
-              <a:spcAft>
-                <a:spcPts val="0"/>
-              </a:spcAft>
-              <a:buNone/>
-            </a:pPr>
-            <a:r>
-              <a:rPr lang="en-US"/>
-              <a:t>One line on RPC, one example, move on. Do NOT get into CORBA/SOAP/XML-RPC archaeology.</a:t>
-            </a:r>
-            <a:endParaRPr/>
+            <a:r>
+              <a:t>One example, no CORBA/SOAP/XML-RPC history.</a:t>
+            </a:r>
           </a:p>
         </p:txBody>
       </p:sp>
@@ -7423,20 +6873,9 @@
           </a:bodyPr>
           <a:lstStyle/>
           <a:p>
-            <a:pPr marL="0" lvl="0" indent="0" algn="l" rtl="0">
-              <a:spcBef>
-                <a:spcPts val="0"/>
-              </a:spcBef>
-              <a:spcAft>
-                <a:spcPts val="0"/>
-              </a:spcAft>
-              <a:buNone/>
-            </a:pPr>
-            <a:r>
-              <a:rPr lang="en-US"/>
-              <a:t>One line on RPC, one example, move on. Do NOT get into CORBA/SOAP/XML-RPC archaeology.</a:t>
-            </a:r>
-            <a:endParaRPr/>
+            <a:r>
+              <a:t>One example, no CORBA/SOAP/XML-RPC history.</a:t>
+            </a:r>
           </a:p>
         </p:txBody>
       </p:sp>
